--- a/EVOLUCION DEL BALONCESTO EUROPEO 1958-2024.pptx
+++ b/EVOLUCION DEL BALONCESTO EUROPEO 1958-2024.pptx
@@ -7915,6 +7915,17 @@
 </file>
 
 <file path=customXml/item1.xml><?xml version="1.0" encoding="utf-8"?>
+<p:properties xmlns:p="http://schemas.microsoft.com/office/2006/metadata/properties" xmlns:xsi="http://www.w3.org/2001/XMLSchema-instance" xmlns:pc="http://schemas.microsoft.com/office/infopath/2007/PartnerControls">
+  <documentManagement>
+    <VSO_x0020_item_x0020_id xmlns="40262f94-9f35-4ac3-9a90-690165a166b7" xsi:nil="true"/>
+    <Assetid_x0020_ xmlns="40262f94-9f35-4ac3-9a90-690165a166b7" xsi:nil="true"/>
+    <Item_x0020_Details xmlns="40262f94-9f35-4ac3-9a90-690165a166b7" xsi:nil="true"/>
+    <Template_x0020_details xmlns="40262f94-9f35-4ac3-9a90-690165a166b7" xsi:nil="true"/>
+  </documentManagement>
+</p:properties>
+</file>
+
+<file path=customXml/item2.xml><?xml version="1.0" encoding="utf-8"?>
 <ct:contentTypeSchema xmlns:ct="http://schemas.microsoft.com/office/2006/metadata/contentType" xmlns:ma="http://schemas.microsoft.com/office/2006/metadata/properties/metaAttributes" ct:_="" ma:_="" ma:contentTypeName="Document" ma:contentTypeID="0x010100AA3F7D94069FF64A86F7DFF56D60E3BE" ma:contentTypeVersion="6" ma:contentTypeDescription="Create a new document." ma:contentTypeScope="" ma:versionID="c32302c77d4085ecf495bdddb7f5e889">
   <xsd:schema xmlns:xsd="http://www.w3.org/2001/XMLSchema" xmlns:xs="http://www.w3.org/2001/XMLSchema" xmlns:p="http://schemas.microsoft.com/office/2006/metadata/properties" xmlns:ns2="a4f35948-e619-41b3-aa29-22878b09cfd2" xmlns:ns3="40262f94-9f35-4ac3-9a90-690165a166b7" targetNamespace="http://schemas.microsoft.com/office/2006/metadata/properties" ma:root="true" ma:fieldsID="4ab5ae46be95f9d0be6107e8200be7a2" ns2:_="" ns3:_="">
     <xsd:import namespace="a4f35948-e619-41b3-aa29-22878b09cfd2"/>
@@ -8095,17 +8106,6 @@
 </ct:contentTypeSchema>
 </file>
 
-<file path=customXml/item2.xml><?xml version="1.0" encoding="utf-8"?>
-<p:properties xmlns:p="http://schemas.microsoft.com/office/2006/metadata/properties" xmlns:xsi="http://www.w3.org/2001/XMLSchema-instance" xmlns:pc="http://schemas.microsoft.com/office/infopath/2007/PartnerControls">
-  <documentManagement>
-    <VSO_x0020_item_x0020_id xmlns="40262f94-9f35-4ac3-9a90-690165a166b7" xsi:nil="true"/>
-    <Assetid_x0020_ xmlns="40262f94-9f35-4ac3-9a90-690165a166b7" xsi:nil="true"/>
-    <Item_x0020_Details xmlns="40262f94-9f35-4ac3-9a90-690165a166b7" xsi:nil="true"/>
-    <Template_x0020_details xmlns="40262f94-9f35-4ac3-9a90-690165a166b7" xsi:nil="true"/>
-  </documentManagement>
-</p:properties>
-</file>
-
 <file path=customXml/item3.xml><?xml version="1.0" encoding="utf-8"?>
 <?mso-contentType ?>
 <FormTemplates xmlns="http://schemas.microsoft.com/sharepoint/v3/contenttype/forms">
@@ -8116,6 +8116,23 @@
 </file>
 
 <file path=customXml/itemProps1.xml><?xml version="1.0" encoding="utf-8"?>
+<ds:datastoreItem xmlns:ds="http://schemas.openxmlformats.org/officeDocument/2006/customXml" ds:itemID="{91DDEFBA-1D7E-4587-9763-EBF5A6740E9A}">
+  <ds:schemaRefs>
+    <ds:schemaRef ds:uri="a4f35948-e619-41b3-aa29-22878b09cfd2"/>
+    <ds:schemaRef ds:uri="http://schemas.microsoft.com/office/infopath/2007/PartnerControls"/>
+    <ds:schemaRef ds:uri="http://schemas.microsoft.com/office/2006/documentManagement/types"/>
+    <ds:schemaRef ds:uri="40262f94-9f35-4ac3-9a90-690165a166b7"/>
+    <ds:schemaRef ds:uri="http://purl.org/dc/dcmitype/"/>
+    <ds:schemaRef ds:uri="http://schemas.microsoft.com/office/2006/metadata/properties"/>
+    <ds:schemaRef ds:uri="http://purl.org/dc/terms/"/>
+    <ds:schemaRef ds:uri="http://purl.org/dc/elements/1.1/"/>
+    <ds:schemaRef ds:uri="http://schemas.openxmlformats.org/package/2006/metadata/core-properties"/>
+    <ds:schemaRef ds:uri="http://www.w3.org/XML/1998/namespace"/>
+  </ds:schemaRefs>
+</ds:datastoreItem>
+</file>
+
+<file path=customXml/itemProps2.xml><?xml version="1.0" encoding="utf-8"?>
 <ds:datastoreItem xmlns:ds="http://schemas.openxmlformats.org/officeDocument/2006/customXml" ds:itemID="{5D30E8E9-C5F6-40D8-943C-DA5B4196A643}">
   <ds:schemaRefs>
     <ds:schemaRef ds:uri="http://schemas.microsoft.com/office/2006/metadata/contentType"/>
@@ -8134,23 +8151,6 @@
 </ds:datastoreItem>
 </file>
 
-<file path=customXml/itemProps2.xml><?xml version="1.0" encoding="utf-8"?>
-<ds:datastoreItem xmlns:ds="http://schemas.openxmlformats.org/officeDocument/2006/customXml" ds:itemID="{91DDEFBA-1D7E-4587-9763-EBF5A6740E9A}">
-  <ds:schemaRefs>
-    <ds:schemaRef ds:uri="a4f35948-e619-41b3-aa29-22878b09cfd2"/>
-    <ds:schemaRef ds:uri="http://schemas.microsoft.com/office/infopath/2007/PartnerControls"/>
-    <ds:schemaRef ds:uri="http://schemas.microsoft.com/office/2006/documentManagement/types"/>
-    <ds:schemaRef ds:uri="40262f94-9f35-4ac3-9a90-690165a166b7"/>
-    <ds:schemaRef ds:uri="http://purl.org/dc/dcmitype/"/>
-    <ds:schemaRef ds:uri="http://schemas.microsoft.com/office/2006/metadata/properties"/>
-    <ds:schemaRef ds:uri="http://purl.org/dc/terms/"/>
-    <ds:schemaRef ds:uri="http://purl.org/dc/elements/1.1/"/>
-    <ds:schemaRef ds:uri="http://schemas.openxmlformats.org/package/2006/metadata/core-properties"/>
-    <ds:schemaRef ds:uri="http://www.w3.org/XML/1998/namespace"/>
-  </ds:schemaRefs>
-</ds:datastoreItem>
-</file>
-
 <file path=customXml/itemProps3.xml><?xml version="1.0" encoding="utf-8"?>
 <ds:datastoreItem xmlns:ds="http://schemas.openxmlformats.org/officeDocument/2006/customXml" ds:itemID="{48E42578-9CD4-4AFF-AA5E-F33052F6B6A6}">
   <ds:schemaRefs>

--- a/EVOLUCION DEL BALONCESTO EUROPEO 1958-2024.pptx
+++ b/EVOLUCION DEL BALONCESTO EUROPEO 1958-2024.pptx
@@ -16,10 +16,10 @@
     <p:sldId id="277" r:id="rId7"/>
     <p:sldId id="265" r:id="rId8"/>
     <p:sldId id="266" r:id="rId9"/>
-    <p:sldId id="270" r:id="rId10"/>
-    <p:sldId id="268" r:id="rId11"/>
-    <p:sldId id="269" r:id="rId12"/>
-    <p:sldId id="271" r:id="rId13"/>
+    <p:sldId id="269" r:id="rId10"/>
+    <p:sldId id="271" r:id="rId11"/>
+    <p:sldId id="270" r:id="rId12"/>
+    <p:sldId id="268" r:id="rId13"/>
     <p:sldId id="278" r:id="rId14"/>
   </p:sldIdLst>
   <p:sldSz cx="12192000" cy="6858000"/>
@@ -1312,7 +1312,7 @@
     </p:spTree>
     <p:extLst>
       <p:ext uri="{BB962C8B-B14F-4D97-AF65-F5344CB8AC3E}">
-        <p14:creationId xmlns:p14="http://schemas.microsoft.com/office/powerpoint/2010/main" val="2672639724"/>
+        <p14:creationId xmlns:p14="http://schemas.microsoft.com/office/powerpoint/2010/main" val="3372349636"/>
       </p:ext>
     </p:extLst>
   </p:cSld>
@@ -1397,7 +1397,7 @@
     </p:spTree>
     <p:extLst>
       <p:ext uri="{BB962C8B-B14F-4D97-AF65-F5344CB8AC3E}">
-        <p14:creationId xmlns:p14="http://schemas.microsoft.com/office/powerpoint/2010/main" val="1181277188"/>
+        <p14:creationId xmlns:p14="http://schemas.microsoft.com/office/powerpoint/2010/main" val="210321733"/>
       </p:ext>
     </p:extLst>
   </p:cSld>
@@ -1482,7 +1482,7 @@
     </p:spTree>
     <p:extLst>
       <p:ext uri="{BB962C8B-B14F-4D97-AF65-F5344CB8AC3E}">
-        <p14:creationId xmlns:p14="http://schemas.microsoft.com/office/powerpoint/2010/main" val="3372349636"/>
+        <p14:creationId xmlns:p14="http://schemas.microsoft.com/office/powerpoint/2010/main" val="2672639724"/>
       </p:ext>
     </p:extLst>
   </p:cSld>
@@ -1567,7 +1567,7 @@
     </p:spTree>
     <p:extLst>
       <p:ext uri="{BB962C8B-B14F-4D97-AF65-F5344CB8AC3E}">
-        <p14:creationId xmlns:p14="http://schemas.microsoft.com/office/powerpoint/2010/main" val="210321733"/>
+        <p14:creationId xmlns:p14="http://schemas.microsoft.com/office/powerpoint/2010/main" val="1181277188"/>
       </p:ext>
     </p:extLst>
   </p:cSld>
@@ -6850,6 +6850,280 @@
             <a:pPr rtl="0"/>
             <a:r>
               <a:rPr lang="es-ES" dirty="0"/>
+              <a:t>       DESINTEGRACION DE YUGOSLAVIA Y LA URSS</a:t>
+            </a:r>
+          </a:p>
+        </p:txBody>
+      </p:sp>
+      <p:sp>
+        <p:nvSpPr>
+          <p:cNvPr id="3" name="Marcador de texto 2"/>
+          <p:cNvSpPr>
+            <a:spLocks noGrp="1"/>
+          </p:cNvSpPr>
+          <p:nvPr>
+            <p:ph type="body" idx="1"/>
+          </p:nvPr>
+        </p:nvSpPr>
+        <p:spPr>
+          <a:xfrm>
+            <a:off x="911424" y="1681163"/>
+            <a:ext cx="4846320" cy="823912"/>
+          </a:xfrm>
+        </p:spPr>
+        <p:txBody>
+          <a:bodyPr rtlCol="0">
+            <a:noAutofit/>
+          </a:bodyPr>
+          <a:lstStyle/>
+          <a:p>
+            <a:r>
+              <a:rPr lang="es-ES" dirty="0"/>
+              <a:t>Yugoslavia se disgrega poco a poco                   el 25 de junio de 1991</a:t>
+            </a:r>
+          </a:p>
+        </p:txBody>
+      </p:sp>
+      <p:sp>
+        <p:nvSpPr>
+          <p:cNvPr id="5" name="Marcador de texto 4"/>
+          <p:cNvSpPr>
+            <a:spLocks noGrp="1"/>
+          </p:cNvSpPr>
+          <p:nvPr>
+            <p:ph type="body" sz="quarter" idx="3"/>
+          </p:nvPr>
+        </p:nvSpPr>
+        <p:spPr/>
+        <p:txBody>
+          <a:bodyPr rtlCol="0">
+            <a:normAutofit fontScale="92500" lnSpcReduction="20000"/>
+          </a:bodyPr>
+          <a:lstStyle/>
+          <a:p>
+            <a:r>
+              <a:rPr lang="es-ES" dirty="0"/>
+              <a:t>Union </a:t>
+            </a:r>
+            <a:r>
+              <a:rPr lang="es-ES" dirty="0" err="1"/>
+              <a:t>Sovietica</a:t>
+            </a:r>
+            <a:r>
+              <a:rPr lang="es-ES" dirty="0"/>
+              <a:t> desaparece el </a:t>
+            </a:r>
+          </a:p>
+          <a:p>
+            <a:r>
+              <a:rPr lang="es-ES" dirty="0"/>
+              <a:t>   26 de diciembre de 1991</a:t>
+            </a:r>
+          </a:p>
+        </p:txBody>
+      </p:sp>
+      <p:pic>
+        <p:nvPicPr>
+          <p:cNvPr id="13" name="Marcador de contenido 12" descr="La descomposición de la Unión Soviética - Mapas de El Orden ...">
+            <a:extLst>
+              <a:ext uri="{FF2B5EF4-FFF2-40B4-BE49-F238E27FC236}">
+                <a16:creationId xmlns:a16="http://schemas.microsoft.com/office/drawing/2014/main" id="{A12296CA-C405-78E7-DEA4-DC87603029BC}"/>
+              </a:ext>
+            </a:extLst>
+          </p:cNvPr>
+          <p:cNvPicPr>
+            <a:picLocks noGrp="1" noChangeAspect="1"/>
+          </p:cNvPicPr>
+          <p:nvPr>
+            <p:ph sz="quarter" idx="4"/>
+          </p:nvPr>
+        </p:nvPicPr>
+        <p:blipFill>
+          <a:blip r:embed="rId3"/>
+          <a:stretch>
+            <a:fillRect/>
+          </a:stretch>
+        </p:blipFill>
+        <p:spPr>
+          <a:xfrm>
+            <a:off x="6469293" y="2706390"/>
+            <a:ext cx="4669160" cy="3874765"/>
+          </a:xfrm>
+          <a:prstGeom prst="rect">
+            <a:avLst/>
+          </a:prstGeom>
+        </p:spPr>
+      </p:pic>
+      <p:pic>
+        <p:nvPicPr>
+          <p:cNvPr id="12" name="Marcador de contenido 11" descr="Cronología de la desintegración de Yugoslavia : r/MapPorn">
+            <a:extLst>
+              <a:ext uri="{FF2B5EF4-FFF2-40B4-BE49-F238E27FC236}">
+                <a16:creationId xmlns:a16="http://schemas.microsoft.com/office/drawing/2014/main" id="{72A0998E-4648-948E-8710-286FCAED2E5F}"/>
+              </a:ext>
+            </a:extLst>
+          </p:cNvPr>
+          <p:cNvPicPr>
+            <a:picLocks noGrp="1" noChangeAspect="1"/>
+          </p:cNvPicPr>
+          <p:nvPr>
+            <p:ph sz="half" idx="2"/>
+          </p:nvPr>
+        </p:nvPicPr>
+        <p:blipFill>
+          <a:blip r:embed="rId4"/>
+          <a:stretch>
+            <a:fillRect/>
+          </a:stretch>
+        </p:blipFill>
+        <p:spPr>
+          <a:xfrm>
+            <a:off x="335360" y="2678435"/>
+            <a:ext cx="5760640" cy="3874765"/>
+          </a:xfrm>
+          <a:prstGeom prst="rect">
+            <a:avLst/>
+          </a:prstGeom>
+        </p:spPr>
+      </p:pic>
+    </p:spTree>
+    <p:extLst>
+      <p:ext uri="{BB962C8B-B14F-4D97-AF65-F5344CB8AC3E}">
+        <p14:creationId xmlns:p14="http://schemas.microsoft.com/office/powerpoint/2010/main" val="4078798235"/>
+      </p:ext>
+    </p:extLst>
+  </p:cSld>
+  <p:clrMapOvr>
+    <a:masterClrMapping/>
+  </p:clrMapOvr>
+  <mc:AlternateContent xmlns:mc="http://schemas.openxmlformats.org/markup-compatibility/2006" xmlns:p14="http://schemas.microsoft.com/office/powerpoint/2010/main">
+    <mc:Choice Requires="p14">
+      <p:transition spd="med" p14:dur="700">
+        <p:fade/>
+      </p:transition>
+    </mc:Choice>
+    <mc:Fallback xmlns="">
+      <p:transition spd="med">
+        <p:fade/>
+      </p:transition>
+    </mc:Fallback>
+  </mc:AlternateContent>
+</p:sld>
+</file>
+
+<file path=ppt/slides/slide7.xml><?xml version="1.0" encoding="utf-8"?>
+<p:sld xmlns:a="http://schemas.openxmlformats.org/drawingml/2006/main" xmlns:r="http://schemas.openxmlformats.org/officeDocument/2006/relationships" xmlns:p="http://schemas.openxmlformats.org/presentationml/2006/main">
+  <p:cSld>
+    <p:spTree>
+      <p:nvGrpSpPr>
+        <p:cNvPr id="1" name=""/>
+        <p:cNvGrpSpPr/>
+        <p:nvPr/>
+      </p:nvGrpSpPr>
+      <p:grpSpPr>
+        <a:xfrm>
+          <a:off x="0" y="0"/>
+          <a:ext cx="0" cy="0"/>
+          <a:chOff x="0" y="0"/>
+          <a:chExt cx="0" cy="0"/>
+        </a:xfrm>
+      </p:grpSpPr>
+      <p:pic>
+        <p:nvPicPr>
+          <p:cNvPr id="3" name="Imagen 2">
+            <a:extLst>
+              <a:ext uri="{FF2B5EF4-FFF2-40B4-BE49-F238E27FC236}">
+                <a16:creationId xmlns:a16="http://schemas.microsoft.com/office/drawing/2014/main" id="{0658F2E9-3FF1-E85D-D259-D2F8ABD4AF48}"/>
+              </a:ext>
+            </a:extLst>
+          </p:cNvPr>
+          <p:cNvPicPr>
+            <a:picLocks noChangeAspect="1"/>
+          </p:cNvPicPr>
+          <p:nvPr/>
+        </p:nvPicPr>
+        <p:blipFill>
+          <a:blip r:embed="rId3" cstate="print">
+            <a:extLst>
+              <a:ext uri="{28A0092B-C50C-407E-A947-70E740481C1C}">
+                <a14:useLocalDpi xmlns:a14="http://schemas.microsoft.com/office/drawing/2010/main" val="0"/>
+              </a:ext>
+            </a:extLst>
+          </a:blip>
+          <a:stretch>
+            <a:fillRect/>
+          </a:stretch>
+        </p:blipFill>
+        <p:spPr>
+          <a:xfrm>
+            <a:off x="0" y="-243408"/>
+            <a:ext cx="12192000" cy="7200800"/>
+          </a:xfrm>
+          <a:prstGeom prst="rect">
+            <a:avLst/>
+          </a:prstGeom>
+        </p:spPr>
+      </p:pic>
+    </p:spTree>
+    <p:extLst>
+      <p:ext uri="{BB962C8B-B14F-4D97-AF65-F5344CB8AC3E}">
+        <p14:creationId xmlns:p14="http://schemas.microsoft.com/office/powerpoint/2010/main" val="242861733"/>
+      </p:ext>
+    </p:extLst>
+  </p:cSld>
+  <p:clrMapOvr>
+    <a:masterClrMapping/>
+  </p:clrMapOvr>
+  <mc:AlternateContent xmlns:mc="http://schemas.openxmlformats.org/markup-compatibility/2006" xmlns:p14="http://schemas.microsoft.com/office/powerpoint/2010/main">
+    <mc:Choice Requires="p14">
+      <p:transition spd="med" p14:dur="700">
+        <p:fade/>
+      </p:transition>
+    </mc:Choice>
+    <mc:Fallback xmlns="">
+      <p:transition spd="med">
+        <p:fade/>
+      </p:transition>
+    </mc:Fallback>
+  </mc:AlternateContent>
+</p:sld>
+</file>
+
+<file path=ppt/slides/slide8.xml><?xml version="1.0" encoding="utf-8"?>
+<p:sld xmlns:a="http://schemas.openxmlformats.org/drawingml/2006/main" xmlns:r="http://schemas.openxmlformats.org/officeDocument/2006/relationships" xmlns:p="http://schemas.openxmlformats.org/presentationml/2006/main">
+  <p:cSld>
+    <p:spTree>
+      <p:nvGrpSpPr>
+        <p:cNvPr id="1" name=""/>
+        <p:cNvGrpSpPr/>
+        <p:nvPr/>
+      </p:nvGrpSpPr>
+      <p:grpSpPr>
+        <a:xfrm>
+          <a:off x="0" y="0"/>
+          <a:ext cx="0" cy="0"/>
+          <a:chOff x="0" y="0"/>
+          <a:chExt cx="0" cy="0"/>
+        </a:xfrm>
+      </p:grpSpPr>
+      <p:sp>
+        <p:nvSpPr>
+          <p:cNvPr id="2" name="Título 1"/>
+          <p:cNvSpPr>
+            <a:spLocks noGrp="1"/>
+          </p:cNvSpPr>
+          <p:nvPr>
+            <p:ph type="title"/>
+          </p:nvPr>
+        </p:nvSpPr>
+        <p:spPr/>
+        <p:txBody>
+          <a:bodyPr rtlCol="0"/>
+          <a:lstStyle/>
+          <a:p>
+            <a:pPr rtl="0"/>
+            <a:r>
+              <a:rPr lang="es-ES" dirty="0"/>
               <a:t>Agregar un título de diapositiva (3)</a:t>
             </a:r>
           </a:p>
@@ -6916,7 +7190,7 @@
 </p:sld>
 </file>
 
-<file path=ppt/slides/slide7.xml><?xml version="1.0" encoding="utf-8"?>
+<file path=ppt/slides/slide9.xml><?xml version="1.0" encoding="utf-8"?>
 <p:sld xmlns:a="http://schemas.openxmlformats.org/drawingml/2006/main" xmlns:r="http://schemas.openxmlformats.org/officeDocument/2006/relationships" xmlns:p="http://schemas.openxmlformats.org/presentationml/2006/main">
   <p:cSld>
     <p:spTree>
@@ -7016,280 +7290,6 @@
     <p:extLst>
       <p:ext uri="{BB962C8B-B14F-4D97-AF65-F5344CB8AC3E}">
         <p14:creationId xmlns:p14="http://schemas.microsoft.com/office/powerpoint/2010/main" val="2993111047"/>
-      </p:ext>
-    </p:extLst>
-  </p:cSld>
-  <p:clrMapOvr>
-    <a:masterClrMapping/>
-  </p:clrMapOvr>
-  <mc:AlternateContent xmlns:mc="http://schemas.openxmlformats.org/markup-compatibility/2006" xmlns:p14="http://schemas.microsoft.com/office/powerpoint/2010/main">
-    <mc:Choice Requires="p14">
-      <p:transition spd="med" p14:dur="700">
-        <p:fade/>
-      </p:transition>
-    </mc:Choice>
-    <mc:Fallback xmlns="">
-      <p:transition spd="med">
-        <p:fade/>
-      </p:transition>
-    </mc:Fallback>
-  </mc:AlternateContent>
-</p:sld>
-</file>
-
-<file path=ppt/slides/slide8.xml><?xml version="1.0" encoding="utf-8"?>
-<p:sld xmlns:a="http://schemas.openxmlformats.org/drawingml/2006/main" xmlns:r="http://schemas.openxmlformats.org/officeDocument/2006/relationships" xmlns:p="http://schemas.openxmlformats.org/presentationml/2006/main">
-  <p:cSld>
-    <p:spTree>
-      <p:nvGrpSpPr>
-        <p:cNvPr id="1" name=""/>
-        <p:cNvGrpSpPr/>
-        <p:nvPr/>
-      </p:nvGrpSpPr>
-      <p:grpSpPr>
-        <a:xfrm>
-          <a:off x="0" y="0"/>
-          <a:ext cx="0" cy="0"/>
-          <a:chOff x="0" y="0"/>
-          <a:chExt cx="0" cy="0"/>
-        </a:xfrm>
-      </p:grpSpPr>
-      <p:sp>
-        <p:nvSpPr>
-          <p:cNvPr id="2" name="Título 1"/>
-          <p:cNvSpPr>
-            <a:spLocks noGrp="1"/>
-          </p:cNvSpPr>
-          <p:nvPr>
-            <p:ph type="title"/>
-          </p:nvPr>
-        </p:nvSpPr>
-        <p:spPr/>
-        <p:txBody>
-          <a:bodyPr rtlCol="0"/>
-          <a:lstStyle/>
-          <a:p>
-            <a:pPr rtl="0"/>
-            <a:r>
-              <a:rPr lang="es-ES" dirty="0"/>
-              <a:t>       DESINTEGRACION DE YUGOSLAVIA Y LA URSS</a:t>
-            </a:r>
-          </a:p>
-        </p:txBody>
-      </p:sp>
-      <p:sp>
-        <p:nvSpPr>
-          <p:cNvPr id="3" name="Marcador de texto 2"/>
-          <p:cNvSpPr>
-            <a:spLocks noGrp="1"/>
-          </p:cNvSpPr>
-          <p:nvPr>
-            <p:ph type="body" idx="1"/>
-          </p:nvPr>
-        </p:nvSpPr>
-        <p:spPr>
-          <a:xfrm>
-            <a:off x="911424" y="1681163"/>
-            <a:ext cx="4846320" cy="823912"/>
-          </a:xfrm>
-        </p:spPr>
-        <p:txBody>
-          <a:bodyPr rtlCol="0">
-            <a:noAutofit/>
-          </a:bodyPr>
-          <a:lstStyle/>
-          <a:p>
-            <a:r>
-              <a:rPr lang="es-ES" dirty="0"/>
-              <a:t>Yugoslavia se disgrega poco a poco                   el 25 de junio de 1991</a:t>
-            </a:r>
-          </a:p>
-        </p:txBody>
-      </p:sp>
-      <p:sp>
-        <p:nvSpPr>
-          <p:cNvPr id="5" name="Marcador de texto 4"/>
-          <p:cNvSpPr>
-            <a:spLocks noGrp="1"/>
-          </p:cNvSpPr>
-          <p:nvPr>
-            <p:ph type="body" sz="quarter" idx="3"/>
-          </p:nvPr>
-        </p:nvSpPr>
-        <p:spPr/>
-        <p:txBody>
-          <a:bodyPr rtlCol="0">
-            <a:normAutofit fontScale="92500" lnSpcReduction="20000"/>
-          </a:bodyPr>
-          <a:lstStyle/>
-          <a:p>
-            <a:r>
-              <a:rPr lang="es-ES" dirty="0"/>
-              <a:t>Union </a:t>
-            </a:r>
-            <a:r>
-              <a:rPr lang="es-ES" dirty="0" err="1"/>
-              <a:t>Sovietica</a:t>
-            </a:r>
-            <a:r>
-              <a:rPr lang="es-ES" dirty="0"/>
-              <a:t> desaparece el </a:t>
-            </a:r>
-          </a:p>
-          <a:p>
-            <a:r>
-              <a:rPr lang="es-ES" dirty="0"/>
-              <a:t>   26 de diciembre de 1991</a:t>
-            </a:r>
-          </a:p>
-        </p:txBody>
-      </p:sp>
-      <p:pic>
-        <p:nvPicPr>
-          <p:cNvPr id="13" name="Marcador de contenido 12" descr="La descomposición de la Unión Soviética - Mapas de El Orden ...">
-            <a:extLst>
-              <a:ext uri="{FF2B5EF4-FFF2-40B4-BE49-F238E27FC236}">
-                <a16:creationId xmlns:a16="http://schemas.microsoft.com/office/drawing/2014/main" id="{A12296CA-C405-78E7-DEA4-DC87603029BC}"/>
-              </a:ext>
-            </a:extLst>
-          </p:cNvPr>
-          <p:cNvPicPr>
-            <a:picLocks noGrp="1" noChangeAspect="1"/>
-          </p:cNvPicPr>
-          <p:nvPr>
-            <p:ph sz="quarter" idx="4"/>
-          </p:nvPr>
-        </p:nvPicPr>
-        <p:blipFill>
-          <a:blip r:embed="rId3"/>
-          <a:stretch>
-            <a:fillRect/>
-          </a:stretch>
-        </p:blipFill>
-        <p:spPr>
-          <a:xfrm>
-            <a:off x="6469293" y="2706390"/>
-            <a:ext cx="4669160" cy="3874765"/>
-          </a:xfrm>
-          <a:prstGeom prst="rect">
-            <a:avLst/>
-          </a:prstGeom>
-        </p:spPr>
-      </p:pic>
-      <p:pic>
-        <p:nvPicPr>
-          <p:cNvPr id="12" name="Marcador de contenido 11" descr="Cronología de la desintegración de Yugoslavia : r/MapPorn">
-            <a:extLst>
-              <a:ext uri="{FF2B5EF4-FFF2-40B4-BE49-F238E27FC236}">
-                <a16:creationId xmlns:a16="http://schemas.microsoft.com/office/drawing/2014/main" id="{72A0998E-4648-948E-8710-286FCAED2E5F}"/>
-              </a:ext>
-            </a:extLst>
-          </p:cNvPr>
-          <p:cNvPicPr>
-            <a:picLocks noGrp="1" noChangeAspect="1"/>
-          </p:cNvPicPr>
-          <p:nvPr>
-            <p:ph sz="half" idx="2"/>
-          </p:nvPr>
-        </p:nvPicPr>
-        <p:blipFill>
-          <a:blip r:embed="rId4"/>
-          <a:stretch>
-            <a:fillRect/>
-          </a:stretch>
-        </p:blipFill>
-        <p:spPr>
-          <a:xfrm>
-            <a:off x="335360" y="2678435"/>
-            <a:ext cx="5760640" cy="3874765"/>
-          </a:xfrm>
-          <a:prstGeom prst="rect">
-            <a:avLst/>
-          </a:prstGeom>
-        </p:spPr>
-      </p:pic>
-    </p:spTree>
-    <p:extLst>
-      <p:ext uri="{BB962C8B-B14F-4D97-AF65-F5344CB8AC3E}">
-        <p14:creationId xmlns:p14="http://schemas.microsoft.com/office/powerpoint/2010/main" val="4078798235"/>
-      </p:ext>
-    </p:extLst>
-  </p:cSld>
-  <p:clrMapOvr>
-    <a:masterClrMapping/>
-  </p:clrMapOvr>
-  <mc:AlternateContent xmlns:mc="http://schemas.openxmlformats.org/markup-compatibility/2006" xmlns:p14="http://schemas.microsoft.com/office/powerpoint/2010/main">
-    <mc:Choice Requires="p14">
-      <p:transition spd="med" p14:dur="700">
-        <p:fade/>
-      </p:transition>
-    </mc:Choice>
-    <mc:Fallback xmlns="">
-      <p:transition spd="med">
-        <p:fade/>
-      </p:transition>
-    </mc:Fallback>
-  </mc:AlternateContent>
-</p:sld>
-</file>
-
-<file path=ppt/slides/slide9.xml><?xml version="1.0" encoding="utf-8"?>
-<p:sld xmlns:a="http://schemas.openxmlformats.org/drawingml/2006/main" xmlns:r="http://schemas.openxmlformats.org/officeDocument/2006/relationships" xmlns:p="http://schemas.openxmlformats.org/presentationml/2006/main">
-  <p:cSld>
-    <p:spTree>
-      <p:nvGrpSpPr>
-        <p:cNvPr id="1" name=""/>
-        <p:cNvGrpSpPr/>
-        <p:nvPr/>
-      </p:nvGrpSpPr>
-      <p:grpSpPr>
-        <a:xfrm>
-          <a:off x="0" y="0"/>
-          <a:ext cx="0" cy="0"/>
-          <a:chOff x="0" y="0"/>
-          <a:chExt cx="0" cy="0"/>
-        </a:xfrm>
-      </p:grpSpPr>
-      <p:pic>
-        <p:nvPicPr>
-          <p:cNvPr id="3" name="Imagen 2">
-            <a:extLst>
-              <a:ext uri="{FF2B5EF4-FFF2-40B4-BE49-F238E27FC236}">
-                <a16:creationId xmlns:a16="http://schemas.microsoft.com/office/drawing/2014/main" id="{0658F2E9-3FF1-E85D-D259-D2F8ABD4AF48}"/>
-              </a:ext>
-            </a:extLst>
-          </p:cNvPr>
-          <p:cNvPicPr>
-            <a:picLocks noChangeAspect="1"/>
-          </p:cNvPicPr>
-          <p:nvPr/>
-        </p:nvPicPr>
-        <p:blipFill>
-          <a:blip r:embed="rId3" cstate="print">
-            <a:extLst>
-              <a:ext uri="{28A0092B-C50C-407E-A947-70E740481C1C}">
-                <a14:useLocalDpi xmlns:a14="http://schemas.microsoft.com/office/drawing/2010/main" val="0"/>
-              </a:ext>
-            </a:extLst>
-          </a:blip>
-          <a:stretch>
-            <a:fillRect/>
-          </a:stretch>
-        </p:blipFill>
-        <p:spPr>
-          <a:xfrm>
-            <a:off x="0" y="-243408"/>
-            <a:ext cx="12192000" cy="7200800"/>
-          </a:xfrm>
-          <a:prstGeom prst="rect">
-            <a:avLst/>
-          </a:prstGeom>
-        </p:spPr>
-      </p:pic>
-    </p:spTree>
-    <p:extLst>
-      <p:ext uri="{BB962C8B-B14F-4D97-AF65-F5344CB8AC3E}">
-        <p14:creationId xmlns:p14="http://schemas.microsoft.com/office/powerpoint/2010/main" val="242861733"/>
       </p:ext>
     </p:extLst>
   </p:cSld>
@@ -7915,17 +7915,6 @@
 </file>
 
 <file path=customXml/item1.xml><?xml version="1.0" encoding="utf-8"?>
-<p:properties xmlns:p="http://schemas.microsoft.com/office/2006/metadata/properties" xmlns:xsi="http://www.w3.org/2001/XMLSchema-instance" xmlns:pc="http://schemas.microsoft.com/office/infopath/2007/PartnerControls">
-  <documentManagement>
-    <VSO_x0020_item_x0020_id xmlns="40262f94-9f35-4ac3-9a90-690165a166b7" xsi:nil="true"/>
-    <Assetid_x0020_ xmlns="40262f94-9f35-4ac3-9a90-690165a166b7" xsi:nil="true"/>
-    <Item_x0020_Details xmlns="40262f94-9f35-4ac3-9a90-690165a166b7" xsi:nil="true"/>
-    <Template_x0020_details xmlns="40262f94-9f35-4ac3-9a90-690165a166b7" xsi:nil="true"/>
-  </documentManagement>
-</p:properties>
-</file>
-
-<file path=customXml/item2.xml><?xml version="1.0" encoding="utf-8"?>
 <ct:contentTypeSchema xmlns:ct="http://schemas.microsoft.com/office/2006/metadata/contentType" xmlns:ma="http://schemas.microsoft.com/office/2006/metadata/properties/metaAttributes" ct:_="" ma:_="" ma:contentTypeName="Document" ma:contentTypeID="0x010100AA3F7D94069FF64A86F7DFF56D60E3BE" ma:contentTypeVersion="6" ma:contentTypeDescription="Create a new document." ma:contentTypeScope="" ma:versionID="c32302c77d4085ecf495bdddb7f5e889">
   <xsd:schema xmlns:xsd="http://www.w3.org/2001/XMLSchema" xmlns:xs="http://www.w3.org/2001/XMLSchema" xmlns:p="http://schemas.microsoft.com/office/2006/metadata/properties" xmlns:ns2="a4f35948-e619-41b3-aa29-22878b09cfd2" xmlns:ns3="40262f94-9f35-4ac3-9a90-690165a166b7" targetNamespace="http://schemas.microsoft.com/office/2006/metadata/properties" ma:root="true" ma:fieldsID="4ab5ae46be95f9d0be6107e8200be7a2" ns2:_="" ns3:_="">
     <xsd:import namespace="a4f35948-e619-41b3-aa29-22878b09cfd2"/>
@@ -8106,6 +8095,17 @@
 </ct:contentTypeSchema>
 </file>
 
+<file path=customXml/item2.xml><?xml version="1.0" encoding="utf-8"?>
+<p:properties xmlns:p="http://schemas.microsoft.com/office/2006/metadata/properties" xmlns:xsi="http://www.w3.org/2001/XMLSchema-instance" xmlns:pc="http://schemas.microsoft.com/office/infopath/2007/PartnerControls">
+  <documentManagement>
+    <VSO_x0020_item_x0020_id xmlns="40262f94-9f35-4ac3-9a90-690165a166b7" xsi:nil="true"/>
+    <Assetid_x0020_ xmlns="40262f94-9f35-4ac3-9a90-690165a166b7" xsi:nil="true"/>
+    <Item_x0020_Details xmlns="40262f94-9f35-4ac3-9a90-690165a166b7" xsi:nil="true"/>
+    <Template_x0020_details xmlns="40262f94-9f35-4ac3-9a90-690165a166b7" xsi:nil="true"/>
+  </documentManagement>
+</p:properties>
+</file>
+
 <file path=customXml/item3.xml><?xml version="1.0" encoding="utf-8"?>
 <?mso-contentType ?>
 <FormTemplates xmlns="http://schemas.microsoft.com/sharepoint/v3/contenttype/forms">
@@ -8116,23 +8116,6 @@
 </file>
 
 <file path=customXml/itemProps1.xml><?xml version="1.0" encoding="utf-8"?>
-<ds:datastoreItem xmlns:ds="http://schemas.openxmlformats.org/officeDocument/2006/customXml" ds:itemID="{91DDEFBA-1D7E-4587-9763-EBF5A6740E9A}">
-  <ds:schemaRefs>
-    <ds:schemaRef ds:uri="a4f35948-e619-41b3-aa29-22878b09cfd2"/>
-    <ds:schemaRef ds:uri="http://schemas.microsoft.com/office/infopath/2007/PartnerControls"/>
-    <ds:schemaRef ds:uri="http://schemas.microsoft.com/office/2006/documentManagement/types"/>
-    <ds:schemaRef ds:uri="40262f94-9f35-4ac3-9a90-690165a166b7"/>
-    <ds:schemaRef ds:uri="http://purl.org/dc/dcmitype/"/>
-    <ds:schemaRef ds:uri="http://schemas.microsoft.com/office/2006/metadata/properties"/>
-    <ds:schemaRef ds:uri="http://purl.org/dc/terms/"/>
-    <ds:schemaRef ds:uri="http://purl.org/dc/elements/1.1/"/>
-    <ds:schemaRef ds:uri="http://schemas.openxmlformats.org/package/2006/metadata/core-properties"/>
-    <ds:schemaRef ds:uri="http://www.w3.org/XML/1998/namespace"/>
-  </ds:schemaRefs>
-</ds:datastoreItem>
-</file>
-
-<file path=customXml/itemProps2.xml><?xml version="1.0" encoding="utf-8"?>
 <ds:datastoreItem xmlns:ds="http://schemas.openxmlformats.org/officeDocument/2006/customXml" ds:itemID="{5D30E8E9-C5F6-40D8-943C-DA5B4196A643}">
   <ds:schemaRefs>
     <ds:schemaRef ds:uri="http://schemas.microsoft.com/office/2006/metadata/contentType"/>
@@ -8151,6 +8134,23 @@
 </ds:datastoreItem>
 </file>
 
+<file path=customXml/itemProps2.xml><?xml version="1.0" encoding="utf-8"?>
+<ds:datastoreItem xmlns:ds="http://schemas.openxmlformats.org/officeDocument/2006/customXml" ds:itemID="{91DDEFBA-1D7E-4587-9763-EBF5A6740E9A}">
+  <ds:schemaRefs>
+    <ds:schemaRef ds:uri="a4f35948-e619-41b3-aa29-22878b09cfd2"/>
+    <ds:schemaRef ds:uri="http://schemas.microsoft.com/office/infopath/2007/PartnerControls"/>
+    <ds:schemaRef ds:uri="http://schemas.microsoft.com/office/2006/documentManagement/types"/>
+    <ds:schemaRef ds:uri="40262f94-9f35-4ac3-9a90-690165a166b7"/>
+    <ds:schemaRef ds:uri="http://purl.org/dc/dcmitype/"/>
+    <ds:schemaRef ds:uri="http://schemas.microsoft.com/office/2006/metadata/properties"/>
+    <ds:schemaRef ds:uri="http://purl.org/dc/terms/"/>
+    <ds:schemaRef ds:uri="http://purl.org/dc/elements/1.1/"/>
+    <ds:schemaRef ds:uri="http://schemas.openxmlformats.org/package/2006/metadata/core-properties"/>
+    <ds:schemaRef ds:uri="http://www.w3.org/XML/1998/namespace"/>
+  </ds:schemaRefs>
+</ds:datastoreItem>
+</file>
+
 <file path=customXml/itemProps3.xml><?xml version="1.0" encoding="utf-8"?>
 <ds:datastoreItem xmlns:ds="http://schemas.openxmlformats.org/officeDocument/2006/customXml" ds:itemID="{48E42578-9CD4-4AFF-AA5E-F33052F6B6A6}">
   <ds:schemaRefs>
